--- a/assets/sjtu-bench-poster-3x4.pptx
+++ b/assets/sjtu-bench-poster-3x4.pptx
@@ -3104,7 +3104,7 @@
         </p:nvSpPr>
         <p:spPr>
           <a:xfrm>
-            <a:off x="5029200" y="-1097280"/>
+            <a:off x="5120640" y="-1097280"/>
             <a:ext cx="3474720" cy="3474720"/>
           </a:xfrm>
           <a:prstGeom prst="ellipse">
@@ -3147,8 +3147,8 @@
         </p:nvSpPr>
         <p:spPr>
           <a:xfrm>
-            <a:off x="5577840" y="5577840"/>
-            <a:ext cx="2011680" cy="2011680"/>
+            <a:off x="5669280" y="5760720"/>
+            <a:ext cx="1828800" cy="1828800"/>
           </a:xfrm>
           <a:prstGeom prst="ellipse">
             <a:avLst/>
@@ -3190,8 +3190,8 @@
         </p:nvSpPr>
         <p:spPr>
           <a:xfrm>
-            <a:off x="5120640" y="7040880"/>
-            <a:ext cx="1371600" cy="1371600"/>
+            <a:off x="5212080" y="7132320"/>
+            <a:ext cx="1280160" cy="1280160"/>
           </a:xfrm>
           <a:prstGeom prst="ellipse">
             <a:avLst/>
@@ -3281,7 +3281,7 @@
           </a:xfrm>
           <a:prstGeom prst="roundRect">
             <a:avLst>
-              <a:gd name="adj" fmla="val 8000"/>
+              <a:gd name="adj" fmla="val 10000"/>
             </a:avLst>
           </a:prstGeom>
           <a:solidFill>
@@ -3361,8 +3361,8 @@
         </p:nvSpPr>
         <p:spPr>
           <a:xfrm>
-            <a:off x="502920" y="987552"/>
-            <a:ext cx="5943600" cy="1737360"/>
+            <a:off x="502920" y="960120"/>
+            <a:ext cx="5852160" cy="1737360"/>
           </a:xfrm>
           <a:prstGeom prst="rect">
             <a:avLst/>
@@ -3408,8 +3408,8 @@
         </p:nvSpPr>
         <p:spPr>
           <a:xfrm>
-            <a:off x="530352" y="2788920"/>
-            <a:ext cx="5760720" cy="731520"/>
+            <a:off x="530352" y="2697480"/>
+            <a:ext cx="5760720" cy="502920"/>
           </a:xfrm>
           <a:prstGeom prst="rect">
             <a:avLst/>
@@ -3417,26 +3417,30 @@
           <a:noFill/>
         </p:spPr>
         <p:txBody>
-          <a:bodyPr wrap="square" lIns="0" rIns="0" tIns="0" bIns="0">
+          <a:bodyPr wrap="none" lIns="0" rIns="0" tIns="0" bIns="0">
             <a:spAutoFit/>
           </a:bodyPr>
           <a:lstStyle/>
           <a:p>
-            <a:pPr algn="l">
-              <a:lnSpc>
-                <a:spcPct val="110000"/>
-              </a:lnSpc>
-            </a:pPr>
-            <a:r>
-              <a:rPr sz="2400" b="1">
+            <a:r>
+              <a:rPr sz="2300" b="1">
+                <a:solidFill>
+                  <a:srgbClr val="22D3EE"/>
+                </a:solidFill>
+                <a:latin typeface="Microsoft YaHei"/>
+                <a:ea typeface="Microsoft YaHei"/>
+              </a:rPr>
+              <a:t>AI </a:t>
+            </a:r>
+            <a:r>
+              <a:rPr sz="2300" b="1">
                 <a:solidFill>
                   <a:srgbClr val="F8FAFC"/>
                 </a:solidFill>
                 <a:latin typeface="Microsoft YaHei"/>
                 <a:ea typeface="Microsoft YaHei"/>
               </a:rPr>
-              <a:t>15 个任务，
-测测你的校园 AI</a:t>
+              <a:t>帮你掌握校园的一切</a:t>
             </a:r>
           </a:p>
         </p:txBody>
@@ -3449,8 +3453,8 @@
         </p:nvSpPr>
         <p:spPr>
           <a:xfrm>
-            <a:off x="530352" y="3657600"/>
-            <a:ext cx="5669280" cy="365760"/>
+            <a:off x="530352" y="3246120"/>
+            <a:ext cx="5669280" cy="274320"/>
           </a:xfrm>
           <a:prstGeom prst="rect">
             <a:avLst/>
@@ -3469,14 +3473,14 @@
               </a:lnSpc>
             </a:pPr>
             <a:r>
-              <a:rPr sz="1300" b="0">
+              <a:rPr sz="1150" b="0">
                 <a:solidFill>
                   <a:srgbClr val="94A3B8"/>
                 </a:solidFill>
                 <a:latin typeface="Microsoft YaHei"/>
                 <a:ea typeface="Microsoft YaHei"/>
               </a:rPr>
-              <a:t>登一次 jAccount，让 AI 真的帮你办事</a:t>
+              <a:t>15 个真实校园任务 · L1–L4</a:t>
             </a:r>
           </a:p>
         </p:txBody>
@@ -3489,16 +3493,16 @@
         </p:nvSpPr>
         <p:spPr>
           <a:xfrm>
-            <a:off x="530352" y="4251960"/>
-            <a:ext cx="548640" cy="310896"/>
+            <a:off x="502920" y="3639312"/>
+            <a:ext cx="5852160" cy="566928"/>
           </a:xfrm>
           <a:prstGeom prst="roundRect">
             <a:avLst>
-              <a:gd name="adj" fmla="val 8000"/>
+              <a:gd name="adj" fmla="val 10000"/>
             </a:avLst>
           </a:prstGeom>
           <a:solidFill>
-            <a:srgbClr val="A3E635"/>
+            <a:srgbClr val="121C2E"/>
           </a:solidFill>
           <a:ln>
             <a:noFill/>
@@ -3528,102 +3532,22 @@
       </p:sp>
       <p:sp>
         <p:nvSpPr>
-          <p:cNvPr id="12" name="TextBox 11"/>
-          <p:cNvSpPr txBox="1"/>
-          <p:nvPr/>
-        </p:nvSpPr>
-        <p:spPr>
-          <a:xfrm>
-            <a:off x="530352" y="4270248"/>
-            <a:ext cx="548640" cy="256032"/>
-          </a:xfrm>
-          <a:prstGeom prst="rect">
-            <a:avLst/>
-          </a:prstGeom>
-          <a:noFill/>
-        </p:spPr>
-        <p:txBody>
-          <a:bodyPr wrap="square" lIns="0" rIns="0" tIns="0" bIns="0">
-            <a:spAutoFit/>
-          </a:bodyPr>
-          <a:lstStyle/>
-          <a:p>
-            <a:pPr algn="ctr">
-              <a:lnSpc>
-                <a:spcPct val="100000"/>
-              </a:lnSpc>
-            </a:pPr>
-            <a:r>
-              <a:rPr sz="1100" b="1">
-                <a:solidFill>
-                  <a:srgbClr val="0B1220"/>
-                </a:solidFill>
-                <a:latin typeface="Microsoft YaHei"/>
-                <a:ea typeface="Microsoft YaHei"/>
-              </a:rPr>
-              <a:t>L1</a:t>
-            </a:r>
-          </a:p>
-        </p:txBody>
-      </p:sp>
-      <p:sp>
-        <p:nvSpPr>
-          <p:cNvPr id="13" name="TextBox 12"/>
-          <p:cNvSpPr txBox="1"/>
-          <p:nvPr/>
-        </p:nvSpPr>
-        <p:spPr>
-          <a:xfrm>
-            <a:off x="1188720" y="4242816"/>
-            <a:ext cx="4937760" cy="347472"/>
-          </a:xfrm>
-          <a:prstGeom prst="rect">
-            <a:avLst/>
-          </a:prstGeom>
-          <a:noFill/>
-        </p:spPr>
-        <p:txBody>
-          <a:bodyPr wrap="square" lIns="0" rIns="0" tIns="0" bIns="0">
-            <a:spAutoFit/>
-          </a:bodyPr>
-          <a:lstStyle/>
-          <a:p>
-            <a:pPr algn="l">
-              <a:lnSpc>
-                <a:spcPct val="100000"/>
-              </a:lnSpc>
-            </a:pPr>
-            <a:r>
-              <a:rPr sz="1150" b="0">
-                <a:solidFill>
-                  <a:srgbClr val="F8FAFC"/>
-                </a:solidFill>
-                <a:latin typeface="Microsoft YaHei"/>
-                <a:ea typeface="Microsoft YaHei"/>
-              </a:rPr>
-              <a:t>课表 / 通知 / 水源 / 交我办</a:t>
-            </a:r>
-          </a:p>
-        </p:txBody>
-      </p:sp>
-      <p:sp>
-        <p:nvSpPr>
-          <p:cNvPr id="14" name="Rounded Rectangle 13"/>
+          <p:cNvPr id="12" name="Rounded Rectangle 11"/>
           <p:cNvSpPr/>
           <p:nvPr/>
         </p:nvSpPr>
         <p:spPr>
           <a:xfrm>
-            <a:off x="530352" y="4709160"/>
-            <a:ext cx="548640" cy="310896"/>
+            <a:off x="502920" y="3639312"/>
+            <a:ext cx="713232" cy="566928"/>
           </a:xfrm>
           <a:prstGeom prst="roundRect">
             <a:avLst>
-              <a:gd name="adj" fmla="val 8000"/>
+              <a:gd name="adj" fmla="val 10000"/>
             </a:avLst>
           </a:prstGeom>
           <a:solidFill>
-            <a:srgbClr val="22D3EE"/>
+            <a:srgbClr val="A3E635"/>
           </a:solidFill>
           <a:ln>
             <a:noFill/>
@@ -3653,14 +3577,14 @@
       </p:sp>
       <p:sp>
         <p:nvSpPr>
-          <p:cNvPr id="15" name="TextBox 14"/>
+          <p:cNvPr id="13" name="TextBox 12"/>
           <p:cNvSpPr txBox="1"/>
           <p:nvPr/>
         </p:nvSpPr>
         <p:spPr>
           <a:xfrm>
-            <a:off x="530352" y="4727448"/>
-            <a:ext cx="548640" cy="256032"/>
+            <a:off x="502920" y="3776472"/>
+            <a:ext cx="713232" cy="292608"/>
           </a:xfrm>
           <a:prstGeom prst="rect">
             <a:avLst/>
@@ -3679,28 +3603,28 @@
               </a:lnSpc>
             </a:pPr>
             <a:r>
-              <a:rPr sz="1100" b="1">
+              <a:rPr sz="1400" b="1">
                 <a:solidFill>
                   <a:srgbClr val="0B1220"/>
                 </a:solidFill>
                 <a:latin typeface="Microsoft YaHei"/>
                 <a:ea typeface="Microsoft YaHei"/>
               </a:rPr>
-              <a:t>L2</a:t>
-            </a:r>
-          </a:p>
-        </p:txBody>
-      </p:sp>
-      <p:sp>
-        <p:nvSpPr>
-          <p:cNvPr id="16" name="TextBox 15"/>
+              <a:t>L1</a:t>
+            </a:r>
+          </a:p>
+        </p:txBody>
+      </p:sp>
+      <p:sp>
+        <p:nvSpPr>
+          <p:cNvPr id="14" name="TextBox 13"/>
           <p:cNvSpPr txBox="1"/>
           <p:nvPr/>
         </p:nvSpPr>
         <p:spPr>
           <a:xfrm>
-            <a:off x="1188720" y="4700016"/>
-            <a:ext cx="4937760" cy="347472"/>
+            <a:off x="1417320" y="3749039"/>
+            <a:ext cx="4754880" cy="365760"/>
           </a:xfrm>
           <a:prstGeom prst="rect">
             <a:avLst/>
@@ -3719,36 +3643,36 @@
               </a:lnSpc>
             </a:pPr>
             <a:r>
-              <a:rPr sz="1150" b="0">
+              <a:rPr sz="1250" b="1">
                 <a:solidFill>
                   <a:srgbClr val="F8FAFC"/>
                 </a:solidFill>
                 <a:latin typeface="Microsoft YaHei"/>
                 <a:ea typeface="Microsoft YaHei"/>
               </a:rPr>
-              <a:t>DDL / 公众号 / 邮箱 / 活动</a:t>
-            </a:r>
-          </a:p>
-        </p:txBody>
-      </p:sp>
-      <p:sp>
-        <p:nvSpPr>
-          <p:cNvPr id="17" name="Rounded Rectangle 16"/>
+              <a:t>查课表 / 通知 / 水源 / 交我办</a:t>
+            </a:r>
+          </a:p>
+        </p:txBody>
+      </p:sp>
+      <p:sp>
+        <p:nvSpPr>
+          <p:cNvPr id="15" name="Rounded Rectangle 14"/>
           <p:cNvSpPr/>
           <p:nvPr/>
         </p:nvSpPr>
         <p:spPr>
           <a:xfrm>
-            <a:off x="530352" y="5166360"/>
-            <a:ext cx="548640" cy="310896"/>
+            <a:off x="502920" y="4315968"/>
+            <a:ext cx="5852160" cy="566928"/>
           </a:xfrm>
           <a:prstGeom prst="roundRect">
             <a:avLst>
-              <a:gd name="adj" fmla="val 8000"/>
+              <a:gd name="adj" fmla="val 10000"/>
             </a:avLst>
           </a:prstGeom>
           <a:solidFill>
-            <a:srgbClr val="FB923C"/>
+            <a:srgbClr val="121C2E"/>
           </a:solidFill>
           <a:ln>
             <a:noFill/>
@@ -3778,102 +3702,22 @@
       </p:sp>
       <p:sp>
         <p:nvSpPr>
-          <p:cNvPr id="18" name="TextBox 17"/>
-          <p:cNvSpPr txBox="1"/>
-          <p:nvPr/>
-        </p:nvSpPr>
-        <p:spPr>
-          <a:xfrm>
-            <a:off x="530352" y="5184648"/>
-            <a:ext cx="548640" cy="256032"/>
-          </a:xfrm>
-          <a:prstGeom prst="rect">
-            <a:avLst/>
-          </a:prstGeom>
-          <a:noFill/>
-        </p:spPr>
-        <p:txBody>
-          <a:bodyPr wrap="square" lIns="0" rIns="0" tIns="0" bIns="0">
-            <a:spAutoFit/>
-          </a:bodyPr>
-          <a:lstStyle/>
-          <a:p>
-            <a:pPr algn="ctr">
-              <a:lnSpc>
-                <a:spcPct val="100000"/>
-              </a:lnSpc>
-            </a:pPr>
-            <a:r>
-              <a:rPr sz="1100" b="1">
-                <a:solidFill>
-                  <a:srgbClr val="0B1220"/>
-                </a:solidFill>
-                <a:latin typeface="Microsoft YaHei"/>
-                <a:ea typeface="Microsoft YaHei"/>
-              </a:rPr>
-              <a:t>L3</a:t>
-            </a:r>
-          </a:p>
-        </p:txBody>
-      </p:sp>
-      <p:sp>
-        <p:nvSpPr>
-          <p:cNvPr id="19" name="TextBox 18"/>
-          <p:cNvSpPr txBox="1"/>
-          <p:nvPr/>
-        </p:nvSpPr>
-        <p:spPr>
-          <a:xfrm>
-            <a:off x="1188720" y="5157216"/>
-            <a:ext cx="4937760" cy="347472"/>
-          </a:xfrm>
-          <a:prstGeom prst="rect">
-            <a:avLst/>
-          </a:prstGeom>
-          <a:noFill/>
-        </p:spPr>
-        <p:txBody>
-          <a:bodyPr wrap="square" lIns="0" rIns="0" tIns="0" bIns="0">
-            <a:spAutoFit/>
-          </a:bodyPr>
-          <a:lstStyle/>
-          <a:p>
-            <a:pPr algn="l">
-              <a:lnSpc>
-                <a:spcPct val="100000"/>
-              </a:lnSpc>
-            </a:pPr>
-            <a:r>
-              <a:rPr sz="1150" b="0">
-                <a:solidFill>
-                  <a:srgbClr val="F8FAFC"/>
-                </a:solidFill>
-                <a:latin typeface="Microsoft YaHei"/>
-                <a:ea typeface="Microsoft YaHei"/>
-              </a:rPr>
-              <a:t>政务流程 / 云盘 / 报销（只预填）</a:t>
-            </a:r>
-          </a:p>
-        </p:txBody>
-      </p:sp>
-      <p:sp>
-        <p:nvSpPr>
-          <p:cNvPr id="20" name="Rounded Rectangle 19"/>
+          <p:cNvPr id="16" name="Rounded Rectangle 15"/>
           <p:cNvSpPr/>
           <p:nvPr/>
         </p:nvSpPr>
         <p:spPr>
           <a:xfrm>
-            <a:off x="530352" y="5623560"/>
-            <a:ext cx="548640" cy="310896"/>
+            <a:off x="502920" y="4315968"/>
+            <a:ext cx="713232" cy="566928"/>
           </a:xfrm>
           <a:prstGeom prst="roundRect">
             <a:avLst>
-              <a:gd name="adj" fmla="val 8000"/>
+              <a:gd name="adj" fmla="val 10000"/>
             </a:avLst>
           </a:prstGeom>
           <a:solidFill>
-            <a:srgbClr val="C4B5FD"/>
+            <a:srgbClr val="22D3EE"/>
           </a:solidFill>
           <a:ln>
             <a:noFill/>
@@ -3903,14 +3747,14 @@
       </p:sp>
       <p:sp>
         <p:nvSpPr>
-          <p:cNvPr id="21" name="TextBox 20"/>
+          <p:cNvPr id="17" name="TextBox 16"/>
           <p:cNvSpPr txBox="1"/>
           <p:nvPr/>
         </p:nvSpPr>
         <p:spPr>
           <a:xfrm>
-            <a:off x="530352" y="5641848"/>
-            <a:ext cx="548640" cy="256032"/>
+            <a:off x="502920" y="4453128"/>
+            <a:ext cx="713232" cy="292608"/>
           </a:xfrm>
           <a:prstGeom prst="rect">
             <a:avLst/>
@@ -3929,28 +3773,28 @@
               </a:lnSpc>
             </a:pPr>
             <a:r>
-              <a:rPr sz="1100" b="1">
+              <a:rPr sz="1400" b="1">
                 <a:solidFill>
                   <a:srgbClr val="0B1220"/>
                 </a:solidFill>
                 <a:latin typeface="Microsoft YaHei"/>
                 <a:ea typeface="Microsoft YaHei"/>
               </a:rPr>
-              <a:t>L4</a:t>
-            </a:r>
-          </a:p>
-        </p:txBody>
-      </p:sp>
-      <p:sp>
-        <p:nvSpPr>
-          <p:cNvPr id="22" name="TextBox 21"/>
+              <a:t>L2</a:t>
+            </a:r>
+          </a:p>
+        </p:txBody>
+      </p:sp>
+      <p:sp>
+        <p:nvSpPr>
+          <p:cNvPr id="18" name="TextBox 17"/>
           <p:cNvSpPr txBox="1"/>
           <p:nvPr/>
         </p:nvSpPr>
         <p:spPr>
           <a:xfrm>
-            <a:off x="1188720" y="5614416"/>
-            <a:ext cx="4937760" cy="347472"/>
+            <a:off x="1417320" y="4425696"/>
+            <a:ext cx="4754880" cy="365760"/>
           </a:xfrm>
           <a:prstGeom prst="rect">
             <a:avLst/>
@@ -3969,32 +3813,32 @@
               </a:lnSpc>
             </a:pPr>
             <a:r>
-              <a:rPr sz="1150" b="0">
+              <a:rPr sz="1250" b="1">
                 <a:solidFill>
                   <a:srgbClr val="F8FAFC"/>
                 </a:solidFill>
                 <a:latin typeface="Microsoft YaHei"/>
                 <a:ea typeface="Microsoft YaHei"/>
               </a:rPr>
-              <a:t>每日简报 / 工作流 / 你的 Agent 方案</a:t>
-            </a:r>
-          </a:p>
-        </p:txBody>
-      </p:sp>
-      <p:sp>
-        <p:nvSpPr>
-          <p:cNvPr id="23" name="Rounded Rectangle 22"/>
+              <a:t>DDL / 公众号 / 邮箱 / 活动</a:t>
+            </a:r>
+          </a:p>
+        </p:txBody>
+      </p:sp>
+      <p:sp>
+        <p:nvSpPr>
+          <p:cNvPr id="19" name="Rounded Rectangle 18"/>
           <p:cNvSpPr/>
           <p:nvPr/>
         </p:nvSpPr>
         <p:spPr>
           <a:xfrm>
-            <a:off x="502920" y="6263640"/>
-            <a:ext cx="5852160" cy="1965960"/>
+            <a:off x="502920" y="4992624"/>
+            <a:ext cx="5852160" cy="566928"/>
           </a:xfrm>
           <a:prstGeom prst="roundRect">
             <a:avLst>
-              <a:gd name="adj" fmla="val 8000"/>
+              <a:gd name="adj" fmla="val 10000"/>
             </a:avLst>
           </a:prstGeom>
           <a:solidFill>
@@ -4028,22 +3872,22 @@
       </p:sp>
       <p:sp>
         <p:nvSpPr>
-          <p:cNvPr id="24" name="Rounded Rectangle 23"/>
+          <p:cNvPr id="20" name="Rounded Rectangle 19"/>
           <p:cNvSpPr/>
           <p:nvPr/>
         </p:nvSpPr>
         <p:spPr>
           <a:xfrm>
-            <a:off x="777240" y="6473952"/>
-            <a:ext cx="5303520" cy="402336"/>
+            <a:off x="502920" y="4992624"/>
+            <a:ext cx="713232" cy="566928"/>
           </a:xfrm>
           <a:prstGeom prst="roundRect">
             <a:avLst>
-              <a:gd name="adj" fmla="val 8000"/>
+              <a:gd name="adj" fmla="val 10000"/>
             </a:avLst>
           </a:prstGeom>
           <a:solidFill>
-            <a:srgbClr val="22D3EE"/>
+            <a:srgbClr val="FB923C"/>
           </a:solidFill>
           <a:ln>
             <a:noFill/>
@@ -4073,14 +3917,14 @@
       </p:sp>
       <p:sp>
         <p:nvSpPr>
-          <p:cNvPr id="25" name="TextBox 24"/>
+          <p:cNvPr id="21" name="TextBox 20"/>
           <p:cNvSpPr txBox="1"/>
           <p:nvPr/>
         </p:nvSpPr>
         <p:spPr>
           <a:xfrm>
-            <a:off x="777240" y="6547104"/>
-            <a:ext cx="5303520" cy="256032"/>
+            <a:off x="502920" y="5129784"/>
+            <a:ext cx="713232" cy="292608"/>
           </a:xfrm>
           <a:prstGeom prst="rect">
             <a:avLst/>
@@ -4099,28 +3943,28 @@
               </a:lnSpc>
             </a:pPr>
             <a:r>
-              <a:rPr sz="1100" b="1">
+              <a:rPr sz="1400" b="1">
                 <a:solidFill>
                   <a:srgbClr val="0B1220"/>
                 </a:solidFill>
                 <a:latin typeface="Microsoft YaHei"/>
                 <a:ea typeface="Microsoft YaHei"/>
               </a:rPr>
-              <a:t>对 agent 说这句话</a:t>
-            </a:r>
-          </a:p>
-        </p:txBody>
-      </p:sp>
-      <p:sp>
-        <p:nvSpPr>
-          <p:cNvPr id="26" name="TextBox 25"/>
+              <a:t>L3</a:t>
+            </a:r>
+          </a:p>
+        </p:txBody>
+      </p:sp>
+      <p:sp>
+        <p:nvSpPr>
+          <p:cNvPr id="22" name="TextBox 21"/>
           <p:cNvSpPr txBox="1"/>
           <p:nvPr/>
         </p:nvSpPr>
         <p:spPr>
           <a:xfrm>
-            <a:off x="777240" y="7040880"/>
-            <a:ext cx="5303520" cy="777240"/>
+            <a:off x="1417320" y="5102352"/>
+            <a:ext cx="4754880" cy="365760"/>
           </a:xfrm>
           <a:prstGeom prst="rect">
             <a:avLst/>
@@ -4133,80 +3977,42 @@
           </a:bodyPr>
           <a:lstStyle/>
           <a:p>
-            <a:pPr algn="ctr">
+            <a:pPr algn="l">
               <a:lnSpc>
                 <a:spcPct val="100000"/>
               </a:lnSpc>
             </a:pPr>
             <a:r>
-              <a:rPr sz="1800" b="1">
+              <a:rPr sz="1250" b="1">
                 <a:solidFill>
                   <a:srgbClr val="F8FAFC"/>
                 </a:solidFill>
                 <a:latin typeface="Microsoft YaHei"/>
                 <a:ea typeface="Microsoft YaHei"/>
               </a:rPr>
-              <a:t>“我要试一试 sjtubench”</a:t>
-            </a:r>
-          </a:p>
-        </p:txBody>
-      </p:sp>
-      <p:sp>
-        <p:nvSpPr>
-          <p:cNvPr id="27" name="TextBox 26"/>
-          <p:cNvSpPr txBox="1"/>
-          <p:nvPr/>
-        </p:nvSpPr>
-        <p:spPr>
-          <a:xfrm>
-            <a:off x="777240" y="7818120"/>
-            <a:ext cx="5303520" cy="274320"/>
-          </a:xfrm>
-          <a:prstGeom prst="rect">
-            <a:avLst/>
-          </a:prstGeom>
-          <a:noFill/>
-        </p:spPr>
-        <p:txBody>
-          <a:bodyPr wrap="square" lIns="0" rIns="0" tIns="0" bIns="0">
-            <a:spAutoFit/>
-          </a:bodyPr>
-          <a:lstStyle/>
-          <a:p>
-            <a:pPr algn="ctr">
-              <a:lnSpc>
-                <a:spcPct val="100000"/>
-              </a:lnSpc>
-            </a:pPr>
-            <a:r>
-              <a:rPr sz="950" b="0">
-                <a:solidFill>
-                  <a:srgbClr val="22D3EE"/>
-                </a:solidFill>
-                <a:latin typeface="Microsoft YaHei"/>
-                <a:ea typeface="Microsoft YaHei"/>
-              </a:rPr>
-              <a:t>LLM 评分 · 匿名排行 · 隐私不出本机</a:t>
-            </a:r>
-          </a:p>
-        </p:txBody>
-      </p:sp>
-      <p:sp>
-        <p:nvSpPr>
-          <p:cNvPr id="28" name="Rectangle 27"/>
+              <a:t>政务流程 / 云盘 / 报销（只预填）</a:t>
+            </a:r>
+          </a:p>
+        </p:txBody>
+      </p:sp>
+      <p:sp>
+        <p:nvSpPr>
+          <p:cNvPr id="23" name="Rounded Rectangle 22"/>
           <p:cNvSpPr/>
           <p:nvPr/>
         </p:nvSpPr>
         <p:spPr>
           <a:xfrm>
-            <a:off x="0" y="8503920"/>
-            <a:ext cx="6858000" cy="640080"/>
-          </a:xfrm>
-          <a:prstGeom prst="rect">
-            <a:avLst/>
+            <a:off x="502920" y="5669280"/>
+            <a:ext cx="5852160" cy="566928"/>
+          </a:xfrm>
+          <a:prstGeom prst="roundRect">
+            <a:avLst>
+              <a:gd name="adj" fmla="val 10000"/>
+            </a:avLst>
           </a:prstGeom>
           <a:solidFill>
-            <a:srgbClr val="0F1828"/>
+            <a:srgbClr val="121C2E"/>
           </a:solidFill>
           <a:ln>
             <a:noFill/>
@@ -4236,14 +4042,99 @@
       </p:sp>
       <p:sp>
         <p:nvSpPr>
-          <p:cNvPr id="29" name="TextBox 28"/>
+          <p:cNvPr id="24" name="Rounded Rectangle 23"/>
+          <p:cNvSpPr/>
+          <p:nvPr/>
+        </p:nvSpPr>
+        <p:spPr>
+          <a:xfrm>
+            <a:off x="502920" y="5669280"/>
+            <a:ext cx="713232" cy="566928"/>
+          </a:xfrm>
+          <a:prstGeom prst="roundRect">
+            <a:avLst>
+              <a:gd name="adj" fmla="val 10000"/>
+            </a:avLst>
+          </a:prstGeom>
+          <a:solidFill>
+            <a:srgbClr val="C4B5FD"/>
+          </a:solidFill>
+          <a:ln>
+            <a:noFill/>
+          </a:ln>
+        </p:spPr>
+        <p:style>
+          <a:lnRef idx="1">
+            <a:schemeClr val="accent1"/>
+          </a:lnRef>
+          <a:fillRef idx="3">
+            <a:schemeClr val="accent1"/>
+          </a:fillRef>
+          <a:effectRef idx="2">
+            <a:schemeClr val="accent1"/>
+          </a:effectRef>
+          <a:fontRef idx="minor">
+            <a:schemeClr val="lt1"/>
+          </a:fontRef>
+        </p:style>
+        <p:txBody>
+          <a:bodyPr rtlCol="0" anchor="ctr"/>
+          <a:lstStyle/>
+          <a:p>
+            <a:pPr algn="ctr"/>
+          </a:p>
+        </p:txBody>
+      </p:sp>
+      <p:sp>
+        <p:nvSpPr>
+          <p:cNvPr id="25" name="TextBox 24"/>
           <p:cNvSpPr txBox="1"/>
           <p:nvPr/>
         </p:nvSpPr>
         <p:spPr>
           <a:xfrm>
-            <a:off x="502920" y="8631936"/>
-            <a:ext cx="4206240" cy="274320"/>
+            <a:off x="502920" y="5806440"/>
+            <a:ext cx="713232" cy="292608"/>
+          </a:xfrm>
+          <a:prstGeom prst="rect">
+            <a:avLst/>
+          </a:prstGeom>
+          <a:noFill/>
+        </p:spPr>
+        <p:txBody>
+          <a:bodyPr wrap="square" lIns="0" rIns="0" tIns="0" bIns="0">
+            <a:spAutoFit/>
+          </a:bodyPr>
+          <a:lstStyle/>
+          <a:p>
+            <a:pPr algn="ctr">
+              <a:lnSpc>
+                <a:spcPct val="100000"/>
+              </a:lnSpc>
+            </a:pPr>
+            <a:r>
+              <a:rPr sz="1400" b="1">
+                <a:solidFill>
+                  <a:srgbClr val="0B1220"/>
+                </a:solidFill>
+                <a:latin typeface="Microsoft YaHei"/>
+                <a:ea typeface="Microsoft YaHei"/>
+              </a:rPr>
+              <a:t>L4</a:t>
+            </a:r>
+          </a:p>
+        </p:txBody>
+      </p:sp>
+      <p:sp>
+        <p:nvSpPr>
+          <p:cNvPr id="26" name="TextBox 25"/>
+          <p:cNvSpPr txBox="1"/>
+          <p:nvPr/>
+        </p:nvSpPr>
+        <p:spPr>
+          <a:xfrm>
+            <a:off x="1417320" y="5779008"/>
+            <a:ext cx="4754880" cy="365760"/>
           </a:xfrm>
           <a:prstGeom prst="rect">
             <a:avLst/>
@@ -4262,7 +4153,295 @@
               </a:lnSpc>
             </a:pPr>
             <a:r>
-              <a:rPr sz="1100" b="1">
+              <a:rPr sz="1250" b="1">
+                <a:solidFill>
+                  <a:srgbClr val="F8FAFC"/>
+                </a:solidFill>
+                <a:latin typeface="Microsoft YaHei"/>
+                <a:ea typeface="Microsoft YaHei"/>
+              </a:rPr>
+              <a:t>每日简报 / 工作流 / 你的 Agent 方案</a:t>
+            </a:r>
+          </a:p>
+        </p:txBody>
+      </p:sp>
+      <p:sp>
+        <p:nvSpPr>
+          <p:cNvPr id="27" name="Rounded Rectangle 26"/>
+          <p:cNvSpPr/>
+          <p:nvPr/>
+        </p:nvSpPr>
+        <p:spPr>
+          <a:xfrm>
+            <a:off x="502920" y="6355080"/>
+            <a:ext cx="5852160" cy="1984248"/>
+          </a:xfrm>
+          <a:prstGeom prst="roundRect">
+            <a:avLst>
+              <a:gd name="adj" fmla="val 10000"/>
+            </a:avLst>
+          </a:prstGeom>
+          <a:solidFill>
+            <a:srgbClr val="121C2E"/>
+          </a:solidFill>
+          <a:ln>
+            <a:noFill/>
+          </a:ln>
+        </p:spPr>
+        <p:style>
+          <a:lnRef idx="1">
+            <a:schemeClr val="accent1"/>
+          </a:lnRef>
+          <a:fillRef idx="3">
+            <a:schemeClr val="accent1"/>
+          </a:fillRef>
+          <a:effectRef idx="2">
+            <a:schemeClr val="accent1"/>
+          </a:effectRef>
+          <a:fontRef idx="minor">
+            <a:schemeClr val="lt1"/>
+          </a:fontRef>
+        </p:style>
+        <p:txBody>
+          <a:bodyPr rtlCol="0" anchor="ctr"/>
+          <a:lstStyle/>
+          <a:p>
+            <a:pPr algn="ctr"/>
+          </a:p>
+        </p:txBody>
+      </p:sp>
+      <p:sp>
+        <p:nvSpPr>
+          <p:cNvPr id="28" name="TextBox 27"/>
+          <p:cNvSpPr txBox="1"/>
+          <p:nvPr/>
+        </p:nvSpPr>
+        <p:spPr>
+          <a:xfrm>
+            <a:off x="640080" y="6675120"/>
+            <a:ext cx="5577840" cy="457200"/>
+          </a:xfrm>
+          <a:prstGeom prst="rect">
+            <a:avLst/>
+          </a:prstGeom>
+          <a:noFill/>
+        </p:spPr>
+        <p:txBody>
+          <a:bodyPr wrap="square" lIns="0" rIns="0" tIns="0" bIns="0">
+            <a:spAutoFit/>
+          </a:bodyPr>
+          <a:lstStyle/>
+          <a:p>
+            <a:pPr algn="ctr">
+              <a:lnSpc>
+                <a:spcPct val="100000"/>
+              </a:lnSpc>
+            </a:pPr>
+            <a:r>
+              <a:rPr sz="1800" b="1">
+                <a:solidFill>
+                  <a:srgbClr val="F8FAFC"/>
+                </a:solidFill>
+                <a:latin typeface="Microsoft YaHei"/>
+                <a:ea typeface="Microsoft YaHei"/>
+              </a:rPr>
+              <a:t>“我要试一试 sjtubench”</a:t>
+            </a:r>
+          </a:p>
+        </p:txBody>
+      </p:sp>
+      <p:sp>
+        <p:nvSpPr>
+          <p:cNvPr id="29" name="TextBox 28"/>
+          <p:cNvSpPr txBox="1"/>
+          <p:nvPr/>
+        </p:nvSpPr>
+        <p:spPr>
+          <a:xfrm>
+            <a:off x="640080" y="7296912"/>
+            <a:ext cx="5577840" cy="256032"/>
+          </a:xfrm>
+          <a:prstGeom prst="rect">
+            <a:avLst/>
+          </a:prstGeom>
+          <a:noFill/>
+        </p:spPr>
+        <p:txBody>
+          <a:bodyPr wrap="square" lIns="0" rIns="0" tIns="0" bIns="0">
+            <a:spAutoFit/>
+          </a:bodyPr>
+          <a:lstStyle/>
+          <a:p>
+            <a:pPr algn="ctr">
+              <a:lnSpc>
+                <a:spcPct val="100000"/>
+              </a:lnSpc>
+            </a:pPr>
+            <a:r>
+              <a:rPr sz="1100" b="0">
+                <a:solidFill>
+                  <a:srgbClr val="94A3B8"/>
+                </a:solidFill>
+                <a:latin typeface="Microsoft YaHei"/>
+                <a:ea typeface="Microsoft YaHei"/>
+              </a:rPr>
+              <a:t>登录一下 jAccount  ↓</a:t>
+            </a:r>
+          </a:p>
+        </p:txBody>
+      </p:sp>
+      <p:sp>
+        <p:nvSpPr>
+          <p:cNvPr id="30" name="TextBox 29"/>
+          <p:cNvSpPr txBox="1"/>
+          <p:nvPr/>
+        </p:nvSpPr>
+        <p:spPr>
+          <a:xfrm>
+            <a:off x="640080" y="7589520"/>
+            <a:ext cx="5577840" cy="365760"/>
+          </a:xfrm>
+          <a:prstGeom prst="rect">
+            <a:avLst/>
+          </a:prstGeom>
+          <a:noFill/>
+        </p:spPr>
+        <p:txBody>
+          <a:bodyPr wrap="square" lIns="0" rIns="0" tIns="0" bIns="0">
+            <a:spAutoFit/>
+          </a:bodyPr>
+          <a:lstStyle/>
+          <a:p>
+            <a:pPr algn="ctr">
+              <a:lnSpc>
+                <a:spcPct val="100000"/>
+              </a:lnSpc>
+            </a:pPr>
+            <a:r>
+              <a:rPr sz="1500" b="1">
+                <a:solidFill>
+                  <a:srgbClr val="F8FAFC"/>
+                </a:solidFill>
+                <a:latin typeface="Microsoft YaHei"/>
+                <a:ea typeface="Microsoft YaHei"/>
+              </a:rPr>
+              <a:t>AI 能帮我省多少时间？</a:t>
+            </a:r>
+          </a:p>
+        </p:txBody>
+      </p:sp>
+      <p:sp>
+        <p:nvSpPr>
+          <p:cNvPr id="31" name="TextBox 30"/>
+          <p:cNvSpPr txBox="1"/>
+          <p:nvPr/>
+        </p:nvSpPr>
+        <p:spPr>
+          <a:xfrm>
+            <a:off x="640080" y="7973568"/>
+            <a:ext cx="5577840" cy="237744"/>
+          </a:xfrm>
+          <a:prstGeom prst="rect">
+            <a:avLst/>
+          </a:prstGeom>
+          <a:noFill/>
+        </p:spPr>
+        <p:txBody>
+          <a:bodyPr wrap="square" lIns="0" rIns="0" tIns="0" bIns="0">
+            <a:spAutoFit/>
+          </a:bodyPr>
+          <a:lstStyle/>
+          <a:p>
+            <a:pPr algn="ctr">
+              <a:lnSpc>
+                <a:spcPct val="100000"/>
+              </a:lnSpc>
+            </a:pPr>
+            <a:r>
+              <a:rPr sz="950" b="0">
+                <a:solidFill>
+                  <a:srgbClr val="22D3EE"/>
+                </a:solidFill>
+                <a:latin typeface="Microsoft YaHei"/>
+                <a:ea typeface="Microsoft YaHei"/>
+              </a:rPr>
+              <a:t>一切隐私信息严格保存在本地</a:t>
+            </a:r>
+          </a:p>
+        </p:txBody>
+      </p:sp>
+      <p:sp>
+        <p:nvSpPr>
+          <p:cNvPr id="32" name="Rectangle 31"/>
+          <p:cNvSpPr/>
+          <p:nvPr/>
+        </p:nvSpPr>
+        <p:spPr>
+          <a:xfrm>
+            <a:off x="0" y="8503920"/>
+            <a:ext cx="6858000" cy="640080"/>
+          </a:xfrm>
+          <a:prstGeom prst="rect">
+            <a:avLst/>
+          </a:prstGeom>
+          <a:solidFill>
+            <a:srgbClr val="0F1828"/>
+          </a:solidFill>
+          <a:ln>
+            <a:noFill/>
+          </a:ln>
+        </p:spPr>
+        <p:style>
+          <a:lnRef idx="1">
+            <a:schemeClr val="accent1"/>
+          </a:lnRef>
+          <a:fillRef idx="3">
+            <a:schemeClr val="accent1"/>
+          </a:fillRef>
+          <a:effectRef idx="2">
+            <a:schemeClr val="accent1"/>
+          </a:effectRef>
+          <a:fontRef idx="minor">
+            <a:schemeClr val="lt1"/>
+          </a:fontRef>
+        </p:style>
+        <p:txBody>
+          <a:bodyPr rtlCol="0" anchor="ctr"/>
+          <a:lstStyle/>
+          <a:p>
+            <a:pPr algn="ctr"/>
+          </a:p>
+        </p:txBody>
+      </p:sp>
+      <p:sp>
+        <p:nvSpPr>
+          <p:cNvPr id="33" name="TextBox 32"/>
+          <p:cNvSpPr txBox="1"/>
+          <p:nvPr/>
+        </p:nvSpPr>
+        <p:spPr>
+          <a:xfrm>
+            <a:off x="502920" y="8641080"/>
+            <a:ext cx="4206240" cy="274320"/>
+          </a:xfrm>
+          <a:prstGeom prst="rect">
+            <a:avLst/>
+          </a:prstGeom>
+          <a:noFill/>
+        </p:spPr>
+        <p:txBody>
+          <a:bodyPr wrap="square" lIns="0" rIns="0" tIns="0" bIns="0">
+            <a:spAutoFit/>
+          </a:bodyPr>
+          <a:lstStyle/>
+          <a:p>
+            <a:pPr algn="l">
+              <a:lnSpc>
+                <a:spcPct val="100000"/>
+              </a:lnSpc>
+            </a:pPr>
+            <a:r>
+              <a:rPr sz="1050" b="1">
                 <a:solidFill>
                   <a:srgbClr val="F8FAFC"/>
                 </a:solidFill>
@@ -4276,13 +4455,13 @@
       </p:sp>
       <p:sp>
         <p:nvSpPr>
-          <p:cNvPr id="30" name="TextBox 29"/>
+          <p:cNvPr id="34" name="TextBox 33"/>
           <p:cNvSpPr txBox="1"/>
           <p:nvPr/>
         </p:nvSpPr>
         <p:spPr>
           <a:xfrm>
-            <a:off x="4572000" y="8641080"/>
+            <a:off x="4572000" y="8650224"/>
             <a:ext cx="1828800" cy="256032"/>
           </a:xfrm>
           <a:prstGeom prst="rect">

--- a/assets/sjtu-bench-poster-3x4.pptx
+++ b/assets/sjtu-bench-poster-3x4.pptx
@@ -4245,7 +4245,7 @@
                 <a:latin typeface="Microsoft YaHei"/>
                 <a:ea typeface="Microsoft YaHei"/>
               </a:rPr>
-              <a:t>“我要试一试 sjtubench”</a:t>
+              <a:t>发送 “我要试一试 sjtubench”</a:t>
             </a:r>
           </a:p>
         </p:txBody>
@@ -4448,7 +4448,7 @@
                 <a:latin typeface="Microsoft YaHei"/>
                 <a:ea typeface="Microsoft YaHei"/>
               </a:rPr>
-              <a:t>github.com/zhenghong-li/sjtu-bench</a:t>
+              <a:t>GitHub 搜索：SJTU-Bench</a:t>
             </a:r>
           </a:p>
         </p:txBody>
